--- a/TimeTree/timetree.pptx
+++ b/TimeTree/timetree.pptx
@@ -104,6 +104,11 @@
       </a:defRPr>
     </a:lvl9pPr>
   </p:defaultTextStyle>
+  <p:extLst>
+    <p:ext uri="{EFAFB233-063F-42B5-8137-9DF3F51BA10A}">
+      <p15:sldGuideLst xmlns:p15="http://schemas.microsoft.com/office/powerpoint/2012/main"/>
+    </p:ext>
+  </p:extLst>
 </p:presentation>
 </file>
 
@@ -3389,10 +3394,10 @@
       </p:pic>
       <p:sp>
         <p:nvSpPr>
-          <p:cNvPr id="7" name="TextBox 6">
-            <a:extLst>
-              <a:ext uri="{FF2B5EF4-FFF2-40B4-BE49-F238E27FC236}">
-                <a16:creationId xmlns:a16="http://schemas.microsoft.com/office/drawing/2014/main" id="{E4284839-F621-572A-5F36-0314B9EF612C}"/>
+          <p:cNvPr id="2" name="TextBox 1">
+            <a:extLst>
+              <a:ext uri="{FF2B5EF4-FFF2-40B4-BE49-F238E27FC236}">
+                <a16:creationId xmlns:a16="http://schemas.microsoft.com/office/drawing/2014/main" id="{B51C6596-3608-26ED-4E1B-55C97F3AA927}"/>
               </a:ext>
             </a:extLst>
           </p:cNvPr>
@@ -3401,8 +3406,8 @@
         </p:nvSpPr>
         <p:spPr>
           <a:xfrm>
-            <a:off x="581025" y="3057525"/>
-            <a:ext cx="4307654" cy="369332"/>
+            <a:off x="439762" y="2531970"/>
+            <a:ext cx="3750129" cy="369332"/>
           </a:xfrm>
           <a:prstGeom prst="rect">
             <a:avLst/>
@@ -3416,14 +3421,111 @@
           <a:lstStyle/>
           <a:p>
             <a:r>
-              <a:rPr lang="en-US" altLang="ko-KR" dirty="0" err="1"/>
-              <a:t>timetree</a:t>
+              <a:rPr lang="ko-KR" altLang="ko-KR" dirty="0" err="1"/>
+              <a:t>timetree-exporter</a:t>
+            </a:r>
+            <a:r>
+              <a:rPr lang="ko-KR" altLang="ko-KR" dirty="0"/>
+              <a:t> -</a:t>
+            </a:r>
+            <a:r>
+              <a:rPr lang="ko-KR" altLang="ko-KR" dirty="0" err="1"/>
+              <a:t>o</a:t>
+            </a:r>
+            <a:r>
+              <a:rPr lang="ko-KR" altLang="ko-KR" dirty="0"/>
+              <a:t> ./timetree.ics</a:t>
+            </a:r>
+            <a:endParaRPr lang="ko-KR" altLang="en-US" dirty="0"/>
+          </a:p>
+        </p:txBody>
+      </p:sp>
+      <p:sp>
+        <p:nvSpPr>
+          <p:cNvPr id="3" name="화살표: 오른쪽 2">
+            <a:extLst>
+              <a:ext uri="{FF2B5EF4-FFF2-40B4-BE49-F238E27FC236}">
+                <a16:creationId xmlns:a16="http://schemas.microsoft.com/office/drawing/2014/main" id="{6913D560-D1AA-4FAB-9518-23D1BDD775BA}"/>
+              </a:ext>
+            </a:extLst>
+          </p:cNvPr>
+          <p:cNvSpPr/>
+          <p:nvPr/>
+        </p:nvSpPr>
+        <p:spPr>
+          <a:xfrm flipH="1">
+            <a:off x="4371975" y="2651972"/>
+            <a:ext cx="1085850" cy="249330"/>
+          </a:xfrm>
+          <a:prstGeom prst="rightArrow">
+            <a:avLst/>
+          </a:prstGeom>
+        </p:spPr>
+        <p:style>
+          <a:lnRef idx="2">
+            <a:schemeClr val="accent1">
+              <a:shade val="15000"/>
+            </a:schemeClr>
+          </a:lnRef>
+          <a:fillRef idx="1">
+            <a:schemeClr val="accent1"/>
+          </a:fillRef>
+          <a:effectRef idx="0">
+            <a:schemeClr val="accent1"/>
+          </a:effectRef>
+          <a:fontRef idx="minor">
+            <a:schemeClr val="lt1"/>
+          </a:fontRef>
+        </p:style>
+        <p:txBody>
+          <a:bodyPr rtlCol="0" anchor="ctr"/>
+          <a:lstStyle/>
+          <a:p>
+            <a:pPr algn="ctr"/>
+            <a:endParaRPr lang="ko-KR" altLang="en-US"/>
+          </a:p>
+        </p:txBody>
+      </p:sp>
+      <p:sp>
+        <p:nvSpPr>
+          <p:cNvPr id="5" name="TextBox 4">
+            <a:extLst>
+              <a:ext uri="{FF2B5EF4-FFF2-40B4-BE49-F238E27FC236}">
+                <a16:creationId xmlns:a16="http://schemas.microsoft.com/office/drawing/2014/main" id="{BF33B104-777B-4DAE-FBDE-2F17DD01F0E9}"/>
+              </a:ext>
+            </a:extLst>
+          </p:cNvPr>
+          <p:cNvSpPr txBox="1"/>
+          <p:nvPr/>
+        </p:nvSpPr>
+        <p:spPr>
+          <a:xfrm>
+            <a:off x="5639909" y="2591971"/>
+            <a:ext cx="5783891" cy="369332"/>
+          </a:xfrm>
+          <a:prstGeom prst="rect">
+            <a:avLst/>
+          </a:prstGeom>
+          <a:noFill/>
+        </p:spPr>
+        <p:txBody>
+          <a:bodyPr wrap="none" rtlCol="0">
+            <a:spAutoFit/>
+          </a:bodyPr>
+          <a:lstStyle/>
+          <a:p>
+            <a:r>
+              <a:rPr lang="ko-KR" altLang="en-US" dirty="0"/>
+              <a:t>파이썬 명령어를 실행한 경로에 </a:t>
             </a:r>
             <a:r>
               <a:rPr lang="en-US" altLang="ko-KR" dirty="0"/>
-              <a:t>-exporter -o path/to/output.ics</a:t>
-            </a:r>
-            <a:endParaRPr lang="ko-KR" altLang="en-US" dirty="0"/>
+              <a:t>timetree.ics </a:t>
+            </a:r>
+            <a:r>
+              <a:rPr lang="ko-KR" altLang="en-US" dirty="0"/>
+              <a:t>파일 생성</a:t>
+            </a:r>
           </a:p>
         </p:txBody>
       </p:sp>
